--- a/Credit_Card_Default.pptx
+++ b/Credit_Card_Default.pptx
@@ -11543,7 +11543,7 @@
       </p:sp>
       <p:pic>
         <p:nvPicPr>
-          <p:cNvPr id="13" name="Picture 12" descr="9225e472-d0c9-580a-8596-d38125fcc07a.png"/>
+          <p:cNvPr id="14" name="Picture 13" descr="2f29bdfa-9235-5be6-a5fc-00814812a0ea.png"/>
           <p:cNvPicPr>
             <a:picLocks noChangeAspect="1"/>
           </p:cNvPicPr>
@@ -11557,30 +11557,6 @@
         </p:blipFill>
         <p:spPr>
           <a:xfrm>
-            <a:off x="347472" y="2011680"/>
-            <a:ext cx="5394960" cy="3017520"/>
-          </a:xfrm>
-          <a:prstGeom prst="rect">
-            <a:avLst/>
-          </a:prstGeom>
-        </p:spPr>
-      </p:pic>
-      <p:pic>
-        <p:nvPicPr>
-          <p:cNvPr id="14" name="Picture 13" descr="2f29bdfa-9235-5be6-a5fc-00814812a0ea.png"/>
-          <p:cNvPicPr>
-            <a:picLocks noChangeAspect="1"/>
-          </p:cNvPicPr>
-          <p:nvPr/>
-        </p:nvPicPr>
-        <p:blipFill>
-          <a:blip r:embed="rId3"/>
-          <a:stretch>
-            <a:fillRect/>
-          </a:stretch>
-        </p:blipFill>
-        <p:spPr>
-          <a:xfrm>
             <a:off x="6400800" y="2011680"/>
             <a:ext cx="5257800" cy="3063240"/>
           </a:xfrm>
@@ -11597,7 +11573,7 @@
         </p:nvSpPr>
         <p:spPr>
           <a:xfrm>
-            <a:off x="384048" y="5047488"/>
+            <a:off x="594360" y="5039021"/>
             <a:ext cx="5257800" cy="201168"/>
           </a:xfrm>
           <a:prstGeom prst="rect">
@@ -11613,7 +11589,7 @@
           <a:p>
             <a:pPr algn="l"/>
             <a:r>
-              <a:rPr sz="930" b="0">
+              <a:rPr sz="930" b="0" dirty="0">
                 <a:solidFill>
                   <a:srgbClr val="56657B"/>
                 </a:solidFill>
@@ -11632,8 +11608,8 @@
         </p:nvSpPr>
         <p:spPr>
           <a:xfrm>
-            <a:off x="6437376" y="5047488"/>
-            <a:ext cx="5230368" cy="201168"/>
+            <a:off x="6675120" y="5012747"/>
+            <a:ext cx="5230368" cy="400110"/>
           </a:xfrm>
           <a:prstGeom prst="rect">
             <a:avLst/>
@@ -11648,14 +11624,15 @@
           <a:p>
             <a:pPr algn="l"/>
             <a:r>
-              <a:rPr sz="930" b="0">
-                <a:solidFill>
-                  <a:srgbClr val="56657B"/>
-                </a:solidFill>
-                <a:latin typeface="Aptos"/>
-              </a:rPr>
-              <a:t>Local view: this individual prediction is explained by additive feature contributions from the baseline to the final score.</a:t>
-            </a:r>
+              <a:rPr lang="en-US" sz="1000" dirty="0"/>
+              <a:t>Local view: SHAP values explain how individual features shift the model output from its baseline prediction.</a:t>
+            </a:r>
+            <a:endParaRPr sz="930" b="0" dirty="0">
+              <a:solidFill>
+                <a:srgbClr val="56657B"/>
+              </a:solidFill>
+              <a:latin typeface="Aptos"/>
+            </a:endParaRPr>
           </a:p>
         </p:txBody>
       </p:sp>
@@ -11837,7 +11814,7 @@
         <p:spPr>
           <a:xfrm>
             <a:off x="548640" y="5815584"/>
-            <a:ext cx="3474720" cy="475488"/>
+            <a:ext cx="3474720" cy="415498"/>
           </a:xfrm>
           <a:prstGeom prst="rect">
             <a:avLst/>
@@ -11852,14 +11829,15 @@
           <a:p>
             <a:pPr algn="l"/>
             <a:r>
-              <a:rPr sz="1030" b="0">
-                <a:solidFill>
-                  <a:srgbClr val="56657B"/>
-                </a:solidFill>
-                <a:latin typeface="Aptos"/>
-              </a:rPr>
-              <a:t>Repayment delays are the strongest warning signs, so analysts should prioritize customers with repeated delinquency for manual review.</a:t>
-            </a:r>
+              <a:rPr lang="en-US" sz="1050" dirty="0"/>
+              <a:t>Credit utilization and billing behavior provide additional risk signals, supporting earlier monitoring and intervention.</a:t>
+            </a:r>
+            <a:endParaRPr sz="1030" b="0" dirty="0">
+              <a:solidFill>
+                <a:srgbClr val="56657B"/>
+              </a:solidFill>
+              <a:latin typeface="Aptos"/>
+            </a:endParaRPr>
           </a:p>
         </p:txBody>
       </p:sp>
@@ -11916,7 +11894,7 @@
         <p:spPr>
           <a:xfrm>
             <a:off x="4306824" y="5815584"/>
-            <a:ext cx="3566160" cy="475488"/>
+            <a:ext cx="3566160" cy="415498"/>
           </a:xfrm>
           <a:prstGeom prst="rect">
             <a:avLst/>
@@ -11931,14 +11909,18 @@
           <a:p>
             <a:pPr algn="l"/>
             <a:r>
-              <a:rPr sz="1030" b="0">
-                <a:solidFill>
-                  <a:srgbClr val="56657B"/>
-                </a:solidFill>
-                <a:latin typeface="Aptos"/>
-              </a:rPr>
-              <a:t>Higher credit utilization and larger outstanding bill amounts often increase predicted default risk, supporting earlier intervention and limit monitoring.</a:t>
-            </a:r>
+              <a:rPr lang="en-US" sz="1050" dirty="0"/>
+              <a:t>Credit utilization and billing behavior provide additional risk signals, supporting earlier monitoring and intervention.</a:t>
+            </a:r>
+            <a:endParaRPr sz="1030" b="0" dirty="0">
+              <a:solidFill>
+                <a:schemeClr val="tx1">
+                  <a:lumMod val="95000"/>
+                  <a:lumOff val="5000"/>
+                </a:schemeClr>
+              </a:solidFill>
+              <a:latin typeface="Aptos"/>
+            </a:endParaRPr>
           </a:p>
         </p:txBody>
       </p:sp>
@@ -11995,7 +11977,7 @@
         <p:spPr>
           <a:xfrm>
             <a:off x="8119872" y="5815584"/>
-            <a:ext cx="3657600" cy="475488"/>
+            <a:ext cx="3657600" cy="415498"/>
           </a:xfrm>
           <a:prstGeom prst="rect">
             <a:avLst/>
@@ -12010,14 +11992,18 @@
           <a:p>
             <a:pPr algn="l"/>
             <a:r>
-              <a:rPr sz="1030" b="0">
-                <a:solidFill>
-                  <a:srgbClr val="56657B"/>
-                </a:solidFill>
-                <a:latin typeface="Aptos"/>
-              </a:rPr>
-              <a:t>SHAP explanations improve transparency: the bank can justify why a customer is flagged and design more targeted risk-management actions.</a:t>
-            </a:r>
+              <a:rPr lang="en-US" sz="1050" dirty="0"/>
+              <a:t>SHAP supports more transparent risk assessments and targeted customer reviews.</a:t>
+            </a:r>
+            <a:endParaRPr sz="1030" b="0" dirty="0">
+              <a:solidFill>
+                <a:schemeClr val="tx1">
+                  <a:lumMod val="95000"/>
+                  <a:lumOff val="5000"/>
+                </a:schemeClr>
+              </a:solidFill>
+              <a:latin typeface="Aptos"/>
+            </a:endParaRPr>
           </a:p>
         </p:txBody>
       </p:sp>
@@ -12112,6 +12098,36 @@
           </a:p>
         </p:txBody>
       </p:sp>
+      <p:pic>
+        <p:nvPicPr>
+          <p:cNvPr id="3" name="Image 2">
+            <a:extLst>
+              <a:ext uri="{FF2B5EF4-FFF2-40B4-BE49-F238E27FC236}">
+                <a16:creationId xmlns:a16="http://schemas.microsoft.com/office/drawing/2014/main" id="{DA2EB944-A1B7-47D2-9D4B-9BF9AE43F0DD}"/>
+              </a:ext>
+            </a:extLst>
+          </p:cNvPr>
+          <p:cNvPicPr>
+            <a:picLocks noChangeAspect="1"/>
+          </p:cNvPicPr>
+          <p:nvPr/>
+        </p:nvPicPr>
+        <p:blipFill>
+          <a:blip r:embed="rId3"/>
+          <a:stretch>
+            <a:fillRect/>
+          </a:stretch>
+        </p:blipFill>
+        <p:spPr>
+          <a:xfrm>
+            <a:off x="703800" y="1978554"/>
+            <a:ext cx="4353120" cy="3026294"/>
+          </a:xfrm>
+          <a:prstGeom prst="rect">
+            <a:avLst/>
+          </a:prstGeom>
+        </p:spPr>
+      </p:pic>
     </p:spTree>
   </p:cSld>
   <p:clrMapOvr>

--- a/Credit_Card_Default.pptx
+++ b/Credit_Card_Default.pptx
@@ -2537,7 +2537,7 @@
                 <a:ea typeface="Aptos" pitchFamily="34" charset="-122"/>
                 <a:cs typeface="Aptos" pitchFamily="34" charset="-120"/>
               </a:rPr>
-              <a:t>FUTURE WORK</a:t>
+              <a:t>CONCLUSION &amp; FUTURE WORK</a:t>
             </a:r>
             <a:endParaRPr lang="en-US" sz="1400" dirty="0"/>
           </a:p>
@@ -2551,8 +2551,8 @@
         </p:nvSpPr>
         <p:spPr>
           <a:xfrm>
-            <a:off x="987552" y="1371600"/>
-            <a:ext cx="9829800" cy="1261872"/>
+            <a:off x="6405710" y="1447080"/>
+            <a:ext cx="5257124" cy="996612"/>
           </a:xfrm>
           <a:prstGeom prst="rect">
             <a:avLst/>
@@ -2566,11 +2566,12 @@
           </a:bodyPr>
           <a:lstStyle/>
           <a:p>
-            <a:pPr marL="0" indent="0">
-              <a:buNone/>
-            </a:pPr>
-            <a:r>
-              <a:rPr lang="en-US" sz="3500" b="1" dirty="0">
+            <a:pPr marL="342900" indent="-342900">
+              <a:buFont typeface="Wingdings" panose="05000000000000000000" pitchFamily="2" charset="2"/>
+              <a:buChar char="v"/>
+            </a:pPr>
+            <a:r>
+              <a:rPr lang="en-US" sz="2400" b="1" dirty="0">
                 <a:solidFill>
                   <a:srgbClr val="FFFFFF"/>
                 </a:solidFill>
@@ -2580,14 +2581,12 @@
               </a:rPr>
               <a:t>Toward real-world</a:t>
             </a:r>
-            <a:endParaRPr lang="en-US" sz="3500" dirty="0"/>
-          </a:p>
-          <a:p>
-            <a:pPr marL="0" indent="0">
-              <a:buNone/>
-            </a:pPr>
-            <a:r>
-              <a:rPr lang="en-US" sz="3500" b="1" dirty="0">
+            <a:r>
+              <a:rPr lang="en-US" sz="2400" dirty="0"/>
+              <a:t> </a:t>
+            </a:r>
+            <a:r>
+              <a:rPr lang="en-US" sz="2400" b="1" dirty="0">
                 <a:solidFill>
                   <a:srgbClr val="FFFFFF"/>
                 </a:solidFill>
@@ -2597,38 +2596,9 @@
               </a:rPr>
               <a:t>credit risk decisions</a:t>
             </a:r>
-            <a:endParaRPr lang="en-US" sz="3500" dirty="0"/>
-          </a:p>
-        </p:txBody>
-      </p:sp>
-      <p:sp>
-        <p:nvSpPr>
-          <p:cNvPr id="5" name="Shape 3"/>
-          <p:cNvSpPr/>
-          <p:nvPr/>
-        </p:nvSpPr>
-        <p:spPr>
-          <a:xfrm>
-            <a:off x="1024128" y="2926080"/>
-            <a:ext cx="105156" cy="105156"/>
-          </a:xfrm>
-          <a:prstGeom prst="roundRect">
-            <a:avLst>
-              <a:gd name="adj" fmla="val 147826"/>
-            </a:avLst>
-          </a:prstGeom>
-          <a:solidFill>
-            <a:srgbClr val="11B6B0"/>
-          </a:solidFill>
-          <a:ln w="12700">
-            <a:solidFill>
-              <a:srgbClr val="11B6B0">
-                <a:alpha val="0"/>
-              </a:srgbClr>
-            </a:solidFill>
-            <a:prstDash val="solid"/>
-          </a:ln>
-        </p:spPr>
+            <a:endParaRPr lang="en-US" sz="2400" dirty="0"/>
+          </a:p>
+        </p:txBody>
       </p:sp>
       <p:sp>
         <p:nvSpPr>
@@ -2638,8 +2608,8 @@
         </p:nvSpPr>
         <p:spPr>
           <a:xfrm>
-            <a:off x="1335024" y="2852928"/>
-            <a:ext cx="9601200" cy="374904"/>
+            <a:off x="6797153" y="2472267"/>
+            <a:ext cx="4990701" cy="2845223"/>
           </a:xfrm>
           <a:prstGeom prst="rect">
             <a:avLst/>
@@ -2653,11 +2623,12 @@
           </a:bodyPr>
           <a:lstStyle/>
           <a:p>
-            <a:pPr marL="0" indent="0">
-              <a:buNone/>
-            </a:pPr>
-            <a:r>
-              <a:rPr lang="en-US" sz="1800" dirty="0">
+            <a:pPr marL="285750" indent="-285750">
+              <a:buFont typeface="Wingdings" panose="05000000000000000000" pitchFamily="2" charset="2"/>
+              <a:buChar char="Ø"/>
+            </a:pPr>
+            <a:r>
+              <a:rPr lang="en-US" sz="1800" b="1" dirty="0">
                 <a:solidFill>
                   <a:srgbClr val="D8E4F7"/>
                 </a:solidFill>
@@ -2667,38 +2638,91 @@
               </a:rPr>
               <a:t>External validation with more recent, representative data</a:t>
             </a:r>
-            <a:endParaRPr lang="en-US" sz="1800" dirty="0"/>
-          </a:p>
-        </p:txBody>
-      </p:sp>
-      <p:sp>
-        <p:nvSpPr>
-          <p:cNvPr id="7" name="Shape 5"/>
-          <p:cNvSpPr/>
-          <p:nvPr/>
-        </p:nvSpPr>
-        <p:spPr>
-          <a:xfrm>
-            <a:off x="1024128" y="3502152"/>
-            <a:ext cx="105156" cy="105156"/>
-          </a:xfrm>
-          <a:prstGeom prst="roundRect">
-            <a:avLst>
-              <a:gd name="adj" fmla="val 147826"/>
-            </a:avLst>
-          </a:prstGeom>
-          <a:solidFill>
-            <a:srgbClr val="11B6B0"/>
-          </a:solidFill>
-          <a:ln w="12700">
-            <a:solidFill>
-              <a:srgbClr val="11B6B0">
-                <a:alpha val="0"/>
-              </a:srgbClr>
-            </a:solidFill>
-            <a:prstDash val="solid"/>
-          </a:ln>
-        </p:spPr>
+          </a:p>
+          <a:p>
+            <a:pPr marL="285750" indent="-285750">
+              <a:buFont typeface="Wingdings" panose="05000000000000000000" pitchFamily="2" charset="2"/>
+              <a:buChar char="Ø"/>
+            </a:pPr>
+            <a:endParaRPr lang="en-US" b="1" dirty="0">
+              <a:solidFill>
+                <a:srgbClr val="D8E4F7"/>
+              </a:solidFill>
+              <a:latin typeface="Aptos" pitchFamily="34" charset="0"/>
+              <a:ea typeface="Aptos" pitchFamily="34" charset="-122"/>
+              <a:cs typeface="Aptos" pitchFamily="34" charset="-120"/>
+            </a:endParaRPr>
+          </a:p>
+          <a:p>
+            <a:pPr marL="285750" indent="-285750">
+              <a:buFont typeface="Wingdings" panose="05000000000000000000" pitchFamily="2" charset="2"/>
+              <a:buChar char="Ø"/>
+            </a:pPr>
+            <a:r>
+              <a:rPr lang="en-US" b="1" dirty="0">
+                <a:solidFill>
+                  <a:schemeClr val="accent1">
+                    <a:lumMod val="20000"/>
+                    <a:lumOff val="80000"/>
+                  </a:schemeClr>
+                </a:solidFill>
+              </a:rPr>
+              <a:t>Probability calibration, threshold optimization, and fairness assessment.</a:t>
+            </a:r>
+          </a:p>
+          <a:p>
+            <a:pPr marL="285750" indent="-285750">
+              <a:buFont typeface="Wingdings" panose="05000000000000000000" pitchFamily="2" charset="2"/>
+              <a:buChar char="Ø"/>
+            </a:pPr>
+            <a:endParaRPr lang="en-US" b="1" dirty="0">
+              <a:solidFill>
+                <a:schemeClr val="bg1"/>
+              </a:solidFill>
+              <a:latin typeface="Aptos" pitchFamily="34" charset="0"/>
+              <a:ea typeface="Aptos" pitchFamily="34" charset="-122"/>
+              <a:cs typeface="Aptos" pitchFamily="34" charset="-120"/>
+            </a:endParaRPr>
+          </a:p>
+          <a:p>
+            <a:pPr marL="285750" indent="-285750">
+              <a:buFont typeface="Wingdings" panose="05000000000000000000" pitchFamily="2" charset="2"/>
+              <a:buChar char="Ø"/>
+            </a:pPr>
+            <a:r>
+              <a:rPr lang="en-US" b="1" dirty="0">
+                <a:solidFill>
+                  <a:schemeClr val="accent1">
+                    <a:lumMod val="20000"/>
+                    <a:lumOff val="80000"/>
+                  </a:schemeClr>
+                </a:solidFill>
+              </a:rPr>
+              <a:t>Model monitoring and pilot interventions to evaluate real-world outcomes.</a:t>
+            </a:r>
+            <a:endParaRPr lang="en-US" sz="1800" b="1" dirty="0">
+              <a:solidFill>
+                <a:schemeClr val="accent1">
+                  <a:lumMod val="20000"/>
+                  <a:lumOff val="80000"/>
+                </a:schemeClr>
+              </a:solidFill>
+            </a:endParaRPr>
+          </a:p>
+          <a:p>
+            <a:pPr marL="285750" indent="-285750">
+              <a:buFont typeface="Arial" panose="020B0604020202020204" pitchFamily="34" charset="0"/>
+              <a:buChar char="•"/>
+            </a:pPr>
+            <a:endParaRPr lang="en-US" dirty="0">
+              <a:solidFill>
+                <a:srgbClr val="D8E4F7"/>
+              </a:solidFill>
+              <a:latin typeface="Aptos" pitchFamily="34" charset="0"/>
+              <a:ea typeface="Aptos" pitchFamily="34" charset="-122"/>
+            </a:endParaRPr>
+          </a:p>
+        </p:txBody>
       </p:sp>
       <p:sp>
         <p:nvSpPr>
@@ -2708,8 +2732,8 @@
         </p:nvSpPr>
         <p:spPr>
           <a:xfrm>
-            <a:off x="1335024" y="3429000"/>
-            <a:ext cx="9601200" cy="374904"/>
+            <a:off x="1069848" y="2574460"/>
+            <a:ext cx="5137573" cy="3164417"/>
           </a:xfrm>
           <a:prstGeom prst="rect">
             <a:avLst/>
@@ -2723,63 +2747,289 @@
           </a:bodyPr>
           <a:lstStyle/>
           <a:p>
+            <a:r>
+              <a:rPr lang="en-US" b="1" dirty="0">
+                <a:solidFill>
+                  <a:schemeClr val="bg1"/>
+                </a:solidFill>
+              </a:rPr>
+              <a:t>     </a:t>
+            </a:r>
+            <a:r>
+              <a:rPr lang="fr-FR" b="1" dirty="0">
+                <a:solidFill>
+                  <a:schemeClr val="bg1"/>
+                </a:solidFill>
+              </a:rPr>
+              <a:t>1. </a:t>
+            </a:r>
+            <a:r>
+              <a:rPr lang="fr-FR" b="1" dirty="0" err="1">
+                <a:solidFill>
+                  <a:schemeClr val="bg1"/>
+                </a:solidFill>
+              </a:rPr>
+              <a:t>Predictive</a:t>
+            </a:r>
+            <a:r>
+              <a:rPr lang="fr-FR" b="1" dirty="0">
+                <a:solidFill>
+                  <a:schemeClr val="bg1"/>
+                </a:solidFill>
+              </a:rPr>
+              <a:t> Performance</a:t>
+            </a:r>
+          </a:p>
+          <a:p>
+            <a:pPr marL="285750" indent="-285750">
+              <a:buFont typeface="Wingdings" panose="05000000000000000000" pitchFamily="2" charset="2"/>
+              <a:buChar char="ü"/>
+            </a:pPr>
+            <a:r>
+              <a:rPr lang="en-US" dirty="0">
+                <a:solidFill>
+                  <a:schemeClr val="bg1"/>
+                </a:solidFill>
+              </a:rPr>
+              <a:t>Weighted </a:t>
+            </a:r>
+            <a:r>
+              <a:rPr lang="en-US" dirty="0" err="1">
+                <a:solidFill>
+                  <a:schemeClr val="bg1"/>
+                </a:solidFill>
+              </a:rPr>
+              <a:t>XGBoost</a:t>
+            </a:r>
+            <a:r>
+              <a:rPr lang="en-US" dirty="0">
+                <a:solidFill>
+                  <a:schemeClr val="bg1"/>
+                </a:solidFill>
+              </a:rPr>
+              <a:t> achieved an F1-score of </a:t>
+            </a:r>
+            <a:r>
+              <a:rPr lang="en-US" b="1" dirty="0">
+                <a:solidFill>
+                  <a:schemeClr val="bg1"/>
+                </a:solidFill>
+              </a:rPr>
+              <a:t>0.5457</a:t>
+            </a:r>
+            <a:r>
+              <a:rPr lang="en-US" dirty="0">
+                <a:solidFill>
+                  <a:schemeClr val="bg1"/>
+                </a:solidFill>
+              </a:rPr>
+              <a:t>, Recall of </a:t>
+            </a:r>
+            <a:r>
+              <a:rPr lang="en-US" b="1" dirty="0">
+                <a:solidFill>
+                  <a:schemeClr val="bg1"/>
+                </a:solidFill>
+              </a:rPr>
+              <a:t>57.12%</a:t>
+            </a:r>
+            <a:r>
+              <a:rPr lang="en-US" dirty="0">
+                <a:solidFill>
+                  <a:schemeClr val="bg1"/>
+                </a:solidFill>
+              </a:rPr>
+              <a:t>, and ROC-AUC of </a:t>
+            </a:r>
+            <a:r>
+              <a:rPr lang="en-US" b="1" dirty="0">
+                <a:solidFill>
+                  <a:schemeClr val="bg1"/>
+                </a:solidFill>
+              </a:rPr>
+              <a:t>0.7818</a:t>
+            </a:r>
+            <a:r>
+              <a:rPr lang="en-US" dirty="0">
+                <a:solidFill>
+                  <a:schemeClr val="bg1"/>
+                </a:solidFill>
+              </a:rPr>
+              <a:t>.</a:t>
+            </a:r>
+          </a:p>
+          <a:p>
+            <a:r>
+              <a:rPr lang="en-US" dirty="0">
+                <a:solidFill>
+                  <a:schemeClr val="bg1"/>
+                </a:solidFill>
+              </a:rPr>
+              <a:t>      </a:t>
+            </a:r>
+            <a:r>
+              <a:rPr lang="en-US" b="1" dirty="0">
+                <a:solidFill>
+                  <a:schemeClr val="bg1"/>
+                </a:solidFill>
+              </a:rPr>
+              <a:t>2. Business Impact</a:t>
+            </a:r>
+          </a:p>
+          <a:p>
+            <a:pPr marL="285750" indent="-285750">
+              <a:buFont typeface="Wingdings" panose="05000000000000000000" pitchFamily="2" charset="2"/>
+              <a:buChar char="ü"/>
+            </a:pPr>
+            <a:r>
+              <a:rPr lang="en-US" dirty="0">
+                <a:solidFill>
+                  <a:schemeClr val="bg1"/>
+                </a:solidFill>
+              </a:rPr>
+              <a:t>Class weighting identified </a:t>
+            </a:r>
+            <a:r>
+              <a:rPr lang="en-US" b="1" dirty="0">
+                <a:solidFill>
+                  <a:schemeClr val="bg1"/>
+                </a:solidFill>
+              </a:rPr>
+              <a:t>263 additional actual defaults</a:t>
+            </a:r>
+            <a:r>
+              <a:rPr lang="en-US" dirty="0">
+                <a:solidFill>
+                  <a:schemeClr val="bg1"/>
+                </a:solidFill>
+              </a:rPr>
+              <a:t>, reducing illustrative error costs by </a:t>
+            </a:r>
+            <a:r>
+              <a:rPr lang="en-US" b="1" dirty="0">
+                <a:solidFill>
+                  <a:schemeClr val="bg1"/>
+                </a:solidFill>
+              </a:rPr>
+              <a:t>€240.6k</a:t>
+            </a:r>
+            <a:r>
+              <a:rPr lang="en-US" dirty="0">
+                <a:solidFill>
+                  <a:schemeClr val="bg1"/>
+                </a:solidFill>
+              </a:rPr>
+              <a:t> under the stated assumptions.</a:t>
+            </a:r>
+          </a:p>
+          <a:p>
+            <a:r>
+              <a:rPr lang="en-US" dirty="0">
+                <a:solidFill>
+                  <a:schemeClr val="bg1"/>
+                </a:solidFill>
+              </a:rPr>
+              <a:t>      </a:t>
+            </a:r>
+            <a:r>
+              <a:rPr lang="en-US" b="1" dirty="0">
+                <a:solidFill>
+                  <a:schemeClr val="bg1"/>
+                </a:solidFill>
+              </a:rPr>
+              <a:t>3. Risk Management</a:t>
+            </a:r>
+            <a:endParaRPr lang="en-US" dirty="0">
+              <a:solidFill>
+                <a:schemeClr val="bg1"/>
+              </a:solidFill>
+            </a:endParaRPr>
+          </a:p>
+          <a:p>
+            <a:pPr marL="285750" indent="-285750">
+              <a:buFont typeface="Wingdings" panose="05000000000000000000" pitchFamily="2" charset="2"/>
+              <a:buChar char="ü"/>
+            </a:pPr>
+            <a:r>
+              <a:rPr lang="en-US" dirty="0">
+                <a:solidFill>
+                  <a:schemeClr val="bg1"/>
+                </a:solidFill>
+              </a:rPr>
+              <a:t>Risk-based ranking identified 361 actual defaults among the top 500 customers, improving review prioritization.</a:t>
+            </a:r>
+          </a:p>
+          <a:p>
+            <a:endParaRPr lang="en-US" dirty="0">
+              <a:solidFill>
+                <a:schemeClr val="bg1"/>
+              </a:solidFill>
+            </a:endParaRPr>
+          </a:p>
+          <a:p>
+            <a:pPr marL="285750" indent="-285750">
+              <a:buFont typeface="Wingdings" panose="05000000000000000000" pitchFamily="2" charset="2"/>
+              <a:buChar char="ü"/>
+            </a:pPr>
+            <a:endParaRPr lang="en-US" dirty="0">
+              <a:solidFill>
+                <a:schemeClr val="bg1"/>
+              </a:solidFill>
+            </a:endParaRPr>
+          </a:p>
+        </p:txBody>
+      </p:sp>
+      <p:sp>
+        <p:nvSpPr>
+          <p:cNvPr id="13" name="Text 11"/>
+          <p:cNvSpPr/>
+          <p:nvPr/>
+        </p:nvSpPr>
+        <p:spPr>
+          <a:xfrm>
+            <a:off x="1005840" y="5779008"/>
+            <a:ext cx="7132320" cy="548640"/>
+          </a:xfrm>
+          <a:prstGeom prst="rect">
+            <a:avLst/>
+          </a:prstGeom>
+          <a:noFill/>
+          <a:ln/>
+        </p:spPr>
+        <p:txBody>
+          <a:bodyPr wrap="square" lIns="0" tIns="0" rIns="0" bIns="0" rtlCol="0" anchor="ctr">
+            <a:normAutofit/>
+          </a:bodyPr>
+          <a:lstStyle/>
+          <a:p>
             <a:pPr marL="0" indent="0">
               <a:buNone/>
             </a:pPr>
             <a:r>
-              <a:rPr lang="en-US" sz="1800" dirty="0">
-                <a:solidFill>
-                  <a:srgbClr val="D8E4F7"/>
+              <a:rPr lang="en-US" sz="3400" b="1" dirty="0">
+                <a:solidFill>
+                  <a:srgbClr val="FFFFFF"/>
                 </a:solidFill>
                 <a:latin typeface="Aptos" pitchFamily="34" charset="0"/>
                 <a:ea typeface="Aptos" pitchFamily="34" charset="-122"/>
                 <a:cs typeface="Aptos" pitchFamily="34" charset="-120"/>
               </a:rPr>
-              <a:t>Probability calibration and decision-threshold optimization</a:t>
-            </a:r>
-            <a:endParaRPr lang="en-US" sz="1800" dirty="0"/>
-          </a:p>
-        </p:txBody>
-      </p:sp>
-      <p:sp>
-        <p:nvSpPr>
-          <p:cNvPr id="9" name="Shape 7"/>
-          <p:cNvSpPr/>
-          <p:nvPr/>
-        </p:nvSpPr>
-        <p:spPr>
-          <a:xfrm>
-            <a:off x="1024128" y="4078224"/>
-            <a:ext cx="105156" cy="105156"/>
-          </a:xfrm>
-          <a:prstGeom prst="roundRect">
-            <a:avLst>
-              <a:gd name="adj" fmla="val 147826"/>
-            </a:avLst>
-          </a:prstGeom>
-          <a:solidFill>
-            <a:srgbClr val="11B6B0"/>
-          </a:solidFill>
-          <a:ln w="12700">
-            <a:solidFill>
-              <a:srgbClr val="11B6B0">
-                <a:alpha val="0"/>
-              </a:srgbClr>
-            </a:solidFill>
-            <a:prstDash val="solid"/>
-          </a:ln>
-        </p:spPr>
-      </p:sp>
-      <p:sp>
-        <p:nvSpPr>
-          <p:cNvPr id="10" name="Text 8"/>
-          <p:cNvSpPr/>
-          <p:nvPr/>
-        </p:nvSpPr>
-        <p:spPr>
-          <a:xfrm>
-            <a:off x="1335024" y="4005072"/>
-            <a:ext cx="9601200" cy="374904"/>
+              <a:t>THANK YOU</a:t>
+            </a:r>
+            <a:endParaRPr lang="en-US" sz="3400" dirty="0"/>
+          </a:p>
+        </p:txBody>
+      </p:sp>
+      <p:sp>
+        <p:nvSpPr>
+          <p:cNvPr id="14" name="Text 12"/>
+          <p:cNvSpPr/>
+          <p:nvPr/>
+        </p:nvSpPr>
+        <p:spPr>
+          <a:xfrm>
+            <a:off x="9034272" y="6007608"/>
+            <a:ext cx="2057400" cy="283464"/>
           </a:xfrm>
           <a:prstGeom prst="rect">
             <a:avLst/>
@@ -2793,63 +3043,40 @@
           </a:bodyPr>
           <a:lstStyle/>
           <a:p>
-            <a:pPr marL="0" indent="0">
+            <a:pPr marL="0" indent="0" algn="r">
               <a:buNone/>
             </a:pPr>
             <a:r>
-              <a:rPr lang="en-US" sz="1800" dirty="0">
-                <a:solidFill>
-                  <a:srgbClr val="D8E4F7"/>
+              <a:rPr lang="en-US" sz="1700" dirty="0">
+                <a:solidFill>
+                  <a:srgbClr val="8EE4E0"/>
                 </a:solidFill>
                 <a:latin typeface="Aptos" pitchFamily="34" charset="0"/>
                 <a:ea typeface="Aptos" pitchFamily="34" charset="-122"/>
                 <a:cs typeface="Aptos" pitchFamily="34" charset="-120"/>
               </a:rPr>
-              <a:t>Fairness, drift monitoring, and stronger governance</a:t>
-            </a:r>
-            <a:endParaRPr lang="en-US" sz="1800" dirty="0"/>
-          </a:p>
-        </p:txBody>
-      </p:sp>
-      <p:sp>
-        <p:nvSpPr>
-          <p:cNvPr id="11" name="Shape 9"/>
-          <p:cNvSpPr/>
-          <p:nvPr/>
-        </p:nvSpPr>
-        <p:spPr>
-          <a:xfrm>
-            <a:off x="1024128" y="4654296"/>
-            <a:ext cx="105156" cy="105156"/>
-          </a:xfrm>
-          <a:prstGeom prst="roundRect">
-            <a:avLst>
-              <a:gd name="adj" fmla="val 147826"/>
-            </a:avLst>
-          </a:prstGeom>
-          <a:solidFill>
-            <a:srgbClr val="11B6B0"/>
-          </a:solidFill>
-          <a:ln w="12700">
-            <a:solidFill>
-              <a:srgbClr val="11B6B0">
-                <a:alpha val="0"/>
-              </a:srgbClr>
-            </a:solidFill>
-            <a:prstDash val="solid"/>
-          </a:ln>
-        </p:spPr>
-      </p:sp>
-      <p:sp>
-        <p:nvSpPr>
-          <p:cNvPr id="12" name="Text 10"/>
-          <p:cNvSpPr/>
-          <p:nvPr/>
-        </p:nvSpPr>
-        <p:spPr>
-          <a:xfrm>
-            <a:off x="1335024" y="4581144"/>
-            <a:ext cx="9601200" cy="374904"/>
+              <a:t>Questions?</a:t>
+            </a:r>
+            <a:endParaRPr lang="en-US" sz="1700" dirty="0"/>
+          </a:p>
+        </p:txBody>
+      </p:sp>
+      <p:sp>
+        <p:nvSpPr>
+          <p:cNvPr id="15" name="Text 2">
+            <a:extLst>
+              <a:ext uri="{FF2B5EF4-FFF2-40B4-BE49-F238E27FC236}">
+                <a16:creationId xmlns:a16="http://schemas.microsoft.com/office/drawing/2014/main" id="{1FD05352-2FED-4509-85B4-5E16429284F3}"/>
+              </a:ext>
+            </a:extLst>
+          </p:cNvPr>
+          <p:cNvSpPr/>
+          <p:nvPr/>
+        </p:nvSpPr>
+        <p:spPr>
+          <a:xfrm>
+            <a:off x="1343828" y="1314450"/>
+            <a:ext cx="3583771" cy="1261872"/>
           </a:xfrm>
           <a:prstGeom prst="rect">
             <a:avLst/>
@@ -2863,103 +3090,21 @@
           </a:bodyPr>
           <a:lstStyle/>
           <a:p>
-            <a:pPr marL="0" indent="0">
-              <a:buNone/>
-            </a:pPr>
-            <a:r>
-              <a:rPr lang="en-US" sz="1800" dirty="0">
-                <a:solidFill>
-                  <a:srgbClr val="D8E4F7"/>
+            <a:pPr marL="342900" indent="-342900">
+              <a:buFont typeface="Wingdings" panose="05000000000000000000" pitchFamily="2" charset="2"/>
+              <a:buChar char="v"/>
+            </a:pPr>
+            <a:r>
+              <a:rPr lang="en-US" sz="2400" b="1" dirty="0">
+                <a:solidFill>
+                  <a:srgbClr val="FFFFFF"/>
                 </a:solidFill>
                 <a:latin typeface="Aptos" pitchFamily="34" charset="0"/>
                 <a:ea typeface="Aptos" pitchFamily="34" charset="-122"/>
-                <a:cs typeface="Aptos" pitchFamily="34" charset="-120"/>
-              </a:rPr>
-              <a:t>Pilot interventions to measure real financial outcomes</a:t>
-            </a:r>
-            <a:endParaRPr lang="en-US" sz="1800" dirty="0"/>
-          </a:p>
-        </p:txBody>
-      </p:sp>
-      <p:sp>
-        <p:nvSpPr>
-          <p:cNvPr id="13" name="Text 11"/>
-          <p:cNvSpPr/>
-          <p:nvPr/>
-        </p:nvSpPr>
-        <p:spPr>
-          <a:xfrm>
-            <a:off x="1005840" y="5779008"/>
-            <a:ext cx="7132320" cy="548640"/>
-          </a:xfrm>
-          <a:prstGeom prst="rect">
-            <a:avLst/>
-          </a:prstGeom>
-          <a:noFill/>
-          <a:ln/>
-        </p:spPr>
-        <p:txBody>
-          <a:bodyPr wrap="square" lIns="0" tIns="0" rIns="0" bIns="0" rtlCol="0" anchor="ctr">
-            <a:normAutofit/>
-          </a:bodyPr>
-          <a:lstStyle/>
-          <a:p>
-            <a:pPr marL="0" indent="0">
-              <a:buNone/>
-            </a:pPr>
-            <a:r>
-              <a:rPr lang="en-US" sz="3400" b="1" dirty="0">
-                <a:solidFill>
-                  <a:srgbClr val="FFFFFF"/>
-                </a:solidFill>
-                <a:latin typeface="Aptos" pitchFamily="34" charset="0"/>
-                <a:ea typeface="Aptos" pitchFamily="34" charset="-122"/>
-                <a:cs typeface="Aptos" pitchFamily="34" charset="-120"/>
-              </a:rPr>
-              <a:t>THANK YOU</a:t>
-            </a:r>
-            <a:endParaRPr lang="en-US" sz="3400" dirty="0"/>
-          </a:p>
-        </p:txBody>
-      </p:sp>
-      <p:sp>
-        <p:nvSpPr>
-          <p:cNvPr id="14" name="Text 12"/>
-          <p:cNvSpPr/>
-          <p:nvPr/>
-        </p:nvSpPr>
-        <p:spPr>
-          <a:xfrm>
-            <a:off x="9034272" y="6007608"/>
-            <a:ext cx="2057400" cy="283464"/>
-          </a:xfrm>
-          <a:prstGeom prst="rect">
-            <a:avLst/>
-          </a:prstGeom>
-          <a:noFill/>
-          <a:ln/>
-        </p:spPr>
-        <p:txBody>
-          <a:bodyPr wrap="square" lIns="0" tIns="0" rIns="0" bIns="0" rtlCol="0" anchor="ctr">
-            <a:normAutofit/>
-          </a:bodyPr>
-          <a:lstStyle/>
-          <a:p>
-            <a:pPr marL="0" indent="0" algn="r">
-              <a:buNone/>
-            </a:pPr>
-            <a:r>
-              <a:rPr lang="en-US" sz="1700" dirty="0">
-                <a:solidFill>
-                  <a:srgbClr val="8EE4E0"/>
-                </a:solidFill>
-                <a:latin typeface="Aptos" pitchFamily="34" charset="0"/>
-                <a:ea typeface="Aptos" pitchFamily="34" charset="-122"/>
-                <a:cs typeface="Aptos" pitchFamily="34" charset="-120"/>
-              </a:rPr>
-              <a:t>Questions?</a:t>
-            </a:r>
-            <a:endParaRPr lang="en-US" sz="1700" dirty="0"/>
+              </a:rPr>
+              <a:t>KEY FINDINGS</a:t>
+            </a:r>
+            <a:endParaRPr lang="en-US" sz="2400" dirty="0"/>
           </a:p>
         </p:txBody>
       </p:sp>

--- a/Credit_Card_Default.pptx
+++ b/Credit_Card_Default.pptx
@@ -1484,7 +1484,7 @@
           <a:p>
             <a:fld id="{5BCAD085-E8A6-8845-BD4E-CB4CCA059FC4}" type="datetimeFigureOut">
               <a:rPr lang="en-US" smtClean="0"/>
-              <a:t>10/27/2026</a:t>
+              <a:t>10/29/2026</a:t>
             </a:fld>
             <a:endParaRPr lang="en-US"/>
           </a:p>
@@ -11975,7 +11975,7 @@
             <a:pPr algn="l"/>
             <a:r>
               <a:rPr lang="en-US" sz="1050" dirty="0"/>
-              <a:t>Credit utilization and billing behavior provide additional risk signals, supporting earlier monitoring and intervention.</a:t>
+              <a:t>Repayment delays are the strongest warning signs, supporting earlier identification of high-risk customers.</a:t>
             </a:r>
             <a:endParaRPr sz="1030" b="0" dirty="0">
               <a:solidFill>
